--- a/m2/diapositivos/sessao-06-m2-f08.pptx
+++ b/m2/diapositivos/sessao-06-m2-f08.pptx
@@ -1884,7 +1884,109 @@
                 <a:ea typeface="Georgia" pitchFamily="34" charset="-122"/>
                 <a:cs typeface="Georgia" pitchFamily="34" charset="-120"/>
               </a:rPr>
-              <a:t>Escreve uma apreciação crítica (180–240 palavras) sobre Inês Pereira: descreve a personagem e a sua evolução e dá um juízo fundamentado. Podes partir da leitura ou da encenação vista na visita de estudo. É a etapa 2 do Projeto do ano, «Quem escolhe por ti», com o estudo que fazes nesse projeto: a cena que assinas, as três fontes, o teu curso. Escreve o rascunho na aula; a versão final, assinada, vai para o portefólio.</a:t>
+              <a:t>Escreve uma </a:t>
+            </a:r>
+            <a:pPr indent="0" marL="0">
+              <a:lnSpc>
+                <a:spcPct val="120000"/>
+              </a:lnSpc>
+              <a:buNone/>
+            </a:pPr>
+            <a:r>
+              <a:rPr lang="en-US" sz="2300" b="1" dirty="0">
+                <a:solidFill>
+                  <a:srgbClr val="F2F0EA"/>
+                </a:solidFill>
+                <a:latin typeface="Georgia" pitchFamily="34" charset="0"/>
+                <a:ea typeface="Georgia" pitchFamily="34" charset="-122"/>
+                <a:cs typeface="Georgia" pitchFamily="34" charset="-120"/>
+              </a:rPr>
+              <a:t>apreciação crítica</a:t>
+            </a:r>
+            <a:pPr indent="0" marL="0">
+              <a:lnSpc>
+                <a:spcPct val="120000"/>
+              </a:lnSpc>
+              <a:buNone/>
+            </a:pPr>
+            <a:r>
+              <a:rPr lang="en-US" sz="2300" dirty="0">
+                <a:solidFill>
+                  <a:srgbClr val="F2F0EA"/>
+                </a:solidFill>
+                <a:latin typeface="Georgia" pitchFamily="34" charset="0"/>
+                <a:ea typeface="Georgia" pitchFamily="34" charset="-122"/>
+                <a:cs typeface="Georgia" pitchFamily="34" charset="-120"/>
+              </a:rPr>
+              <a:t> (180–240 palavras) sobre </a:t>
+            </a:r>
+            <a:pPr indent="0" marL="0">
+              <a:lnSpc>
+                <a:spcPct val="120000"/>
+              </a:lnSpc>
+              <a:buNone/>
+            </a:pPr>
+            <a:r>
+              <a:rPr lang="en-US" sz="2300" b="1" dirty="0">
+                <a:solidFill>
+                  <a:srgbClr val="F2F0EA"/>
+                </a:solidFill>
+                <a:latin typeface="Georgia" pitchFamily="34" charset="0"/>
+                <a:ea typeface="Georgia" pitchFamily="34" charset="-122"/>
+                <a:cs typeface="Georgia" pitchFamily="34" charset="-120"/>
+              </a:rPr>
+              <a:t>Inês Pereira</a:t>
+            </a:r>
+            <a:pPr indent="0" marL="0">
+              <a:lnSpc>
+                <a:spcPct val="120000"/>
+              </a:lnSpc>
+              <a:buNone/>
+            </a:pPr>
+            <a:r>
+              <a:rPr lang="en-US" sz="2300" dirty="0">
+                <a:solidFill>
+                  <a:srgbClr val="F2F0EA"/>
+                </a:solidFill>
+                <a:latin typeface="Georgia" pitchFamily="34" charset="0"/>
+                <a:ea typeface="Georgia" pitchFamily="34" charset="-122"/>
+                <a:cs typeface="Georgia" pitchFamily="34" charset="-120"/>
+              </a:rPr>
+              <a:t>: descreve a personagem e a sua evolução e dá um juízo fundamentado. Podes partir da leitura ou da encenação vista na visita de estudo. É a </a:t>
+            </a:r>
+            <a:pPr indent="0" marL="0">
+              <a:lnSpc>
+                <a:spcPct val="120000"/>
+              </a:lnSpc>
+              <a:buNone/>
+            </a:pPr>
+            <a:r>
+              <a:rPr lang="en-US" sz="2300" b="1" dirty="0">
+                <a:solidFill>
+                  <a:srgbClr val="F2F0EA"/>
+                </a:solidFill>
+                <a:latin typeface="Georgia" pitchFamily="34" charset="0"/>
+                <a:ea typeface="Georgia" pitchFamily="34" charset="-122"/>
+                <a:cs typeface="Georgia" pitchFamily="34" charset="-120"/>
+              </a:rPr>
+              <a:t>etapa 2 do Projeto do ano</a:t>
+            </a:r>
+            <a:pPr indent="0" marL="0">
+              <a:lnSpc>
+                <a:spcPct val="120000"/>
+              </a:lnSpc>
+              <a:buNone/>
+            </a:pPr>
+            <a:r>
+              <a:rPr lang="en-US" sz="2300" dirty="0">
+                <a:solidFill>
+                  <a:srgbClr val="F2F0EA"/>
+                </a:solidFill>
+                <a:latin typeface="Georgia" pitchFamily="34" charset="0"/>
+                <a:ea typeface="Georgia" pitchFamily="34" charset="-122"/>
+                <a:cs typeface="Georgia" pitchFamily="34" charset="-120"/>
+              </a:rPr>
+              <a:t>, «Quem escolhe por ti», com o estudo que fazes nesse projeto: a cena que assinas, as três fontes, o teu curso. Escreve o rascunho na aula; a versão final, assinada, vai para o portefólio.</a:t>
             </a:r>
             <a:endParaRPr lang="en-US" sz="2300" dirty="0"/>
           </a:p>
